--- a/Novosibirsk_State_University/Английский язык/5 семестр/Homework/Latest achievements in nuclear research.pptx
+++ b/Novosibirsk_State_University/Английский язык/5 семестр/Homework/Latest achievements in nuclear research.pptx
@@ -262,7 +262,7 @@
           <a:p>
             <a:fld id="{2C596D42-14E7-4E4A-A4A9-E6BEF18787BD}" type="datetimeFigureOut">
               <a:rPr lang="ru-RU" smtClean="0"/>
-              <a:t>27.09.2024</a:t>
+              <a:t>19.12.2025</a:t>
             </a:fld>
             <a:endParaRPr lang="ru-RU"/>
           </a:p>
@@ -460,7 +460,7 @@
           <a:p>
             <a:fld id="{2C596D42-14E7-4E4A-A4A9-E6BEF18787BD}" type="datetimeFigureOut">
               <a:rPr lang="ru-RU" smtClean="0"/>
-              <a:t>27.09.2024</a:t>
+              <a:t>19.12.2025</a:t>
             </a:fld>
             <a:endParaRPr lang="ru-RU"/>
           </a:p>
@@ -668,7 +668,7 @@
           <a:p>
             <a:fld id="{2C596D42-14E7-4E4A-A4A9-E6BEF18787BD}" type="datetimeFigureOut">
               <a:rPr lang="ru-RU" smtClean="0"/>
-              <a:t>27.09.2024</a:t>
+              <a:t>19.12.2025</a:t>
             </a:fld>
             <a:endParaRPr lang="ru-RU"/>
           </a:p>
@@ -866,7 +866,7 @@
           <a:p>
             <a:fld id="{2C596D42-14E7-4E4A-A4A9-E6BEF18787BD}" type="datetimeFigureOut">
               <a:rPr lang="ru-RU" smtClean="0"/>
-              <a:t>27.09.2024</a:t>
+              <a:t>19.12.2025</a:t>
             </a:fld>
             <a:endParaRPr lang="ru-RU"/>
           </a:p>
@@ -1141,7 +1141,7 @@
           <a:p>
             <a:fld id="{2C596D42-14E7-4E4A-A4A9-E6BEF18787BD}" type="datetimeFigureOut">
               <a:rPr lang="ru-RU" smtClean="0"/>
-              <a:t>27.09.2024</a:t>
+              <a:t>19.12.2025</a:t>
             </a:fld>
             <a:endParaRPr lang="ru-RU"/>
           </a:p>
@@ -1406,7 +1406,7 @@
           <a:p>
             <a:fld id="{2C596D42-14E7-4E4A-A4A9-E6BEF18787BD}" type="datetimeFigureOut">
               <a:rPr lang="ru-RU" smtClean="0"/>
-              <a:t>27.09.2024</a:t>
+              <a:t>19.12.2025</a:t>
             </a:fld>
             <a:endParaRPr lang="ru-RU"/>
           </a:p>
@@ -1818,7 +1818,7 @@
           <a:p>
             <a:fld id="{2C596D42-14E7-4E4A-A4A9-E6BEF18787BD}" type="datetimeFigureOut">
               <a:rPr lang="ru-RU" smtClean="0"/>
-              <a:t>27.09.2024</a:t>
+              <a:t>19.12.2025</a:t>
             </a:fld>
             <a:endParaRPr lang="ru-RU"/>
           </a:p>
@@ -1959,7 +1959,7 @@
           <a:p>
             <a:fld id="{2C596D42-14E7-4E4A-A4A9-E6BEF18787BD}" type="datetimeFigureOut">
               <a:rPr lang="ru-RU" smtClean="0"/>
-              <a:t>27.09.2024</a:t>
+              <a:t>19.12.2025</a:t>
             </a:fld>
             <a:endParaRPr lang="ru-RU"/>
           </a:p>
@@ -2072,7 +2072,7 @@
           <a:p>
             <a:fld id="{2C596D42-14E7-4E4A-A4A9-E6BEF18787BD}" type="datetimeFigureOut">
               <a:rPr lang="ru-RU" smtClean="0"/>
-              <a:t>27.09.2024</a:t>
+              <a:t>19.12.2025</a:t>
             </a:fld>
             <a:endParaRPr lang="ru-RU"/>
           </a:p>
@@ -2383,7 +2383,7 @@
           <a:p>
             <a:fld id="{2C596D42-14E7-4E4A-A4A9-E6BEF18787BD}" type="datetimeFigureOut">
               <a:rPr lang="ru-RU" smtClean="0"/>
-              <a:t>27.09.2024</a:t>
+              <a:t>19.12.2025</a:t>
             </a:fld>
             <a:endParaRPr lang="ru-RU"/>
           </a:p>
@@ -2671,7 +2671,7 @@
           <a:p>
             <a:fld id="{2C596D42-14E7-4E4A-A4A9-E6BEF18787BD}" type="datetimeFigureOut">
               <a:rPr lang="ru-RU" smtClean="0"/>
-              <a:t>27.09.2024</a:t>
+              <a:t>19.12.2025</a:t>
             </a:fld>
             <a:endParaRPr lang="ru-RU"/>
           </a:p>
@@ -2912,7 +2912,7 @@
           <a:p>
             <a:fld id="{2C596D42-14E7-4E4A-A4A9-E6BEF18787BD}" type="datetimeFigureOut">
               <a:rPr lang="ru-RU" smtClean="0"/>
-              <a:t>27.09.2024</a:t>
+              <a:t>19.12.2025</a:t>
             </a:fld>
             <a:endParaRPr lang="ru-RU"/>
           </a:p>
@@ -3357,11 +3357,15 @@
           <a:p>
             <a:r>
               <a:rPr lang="en-US" sz="6000" dirty="0">
-                <a:latin typeface="+mn-lt"/>
+                <a:latin typeface="Times New Roman" panose="02020603050405020304" pitchFamily="18" charset="0"/>
+                <a:cs typeface="Times New Roman" panose="02020603050405020304" pitchFamily="18" charset="0"/>
               </a:rPr>
               <a:t>Latest achievements in nuclear research</a:t>
             </a:r>
-            <a:endParaRPr lang="ru-RU" dirty="0"/>
+            <a:endParaRPr lang="ru-RU" dirty="0">
+              <a:latin typeface="Times New Roman" panose="02020603050405020304" pitchFamily="18" charset="0"/>
+              <a:cs typeface="Times New Roman" panose="02020603050405020304" pitchFamily="18" charset="0"/>
+            </a:endParaRPr>
           </a:p>
         </p:txBody>
       </p:sp>
@@ -3756,7 +3760,10 @@
               <a:buChar char="•"/>
             </a:pPr>
             <a:r>
-              <a:rPr lang="en-US" sz="2000" dirty="0"/>
+              <a:rPr lang="en-US" sz="2000" dirty="0">
+                <a:latin typeface="Times New Roman" panose="02020603050405020304" pitchFamily="18" charset="0"/>
+                <a:cs typeface="Times New Roman" panose="02020603050405020304" pitchFamily="18" charset="0"/>
+              </a:rPr>
               <a:t>Nuclear fission</a:t>
             </a:r>
           </a:p>
@@ -3769,7 +3776,10 @@
               <a:buChar char="•"/>
             </a:pPr>
             <a:r>
-              <a:rPr lang="en-US" sz="2000" dirty="0"/>
+              <a:rPr lang="en-US" sz="2000" dirty="0">
+                <a:latin typeface="Times New Roman" panose="02020603050405020304" pitchFamily="18" charset="0"/>
+                <a:cs typeface="Times New Roman" panose="02020603050405020304" pitchFamily="18" charset="0"/>
+              </a:rPr>
               <a:t>Nuclear waste problems</a:t>
             </a:r>
           </a:p>
@@ -3782,7 +3792,10 @@
               <a:buChar char="•"/>
             </a:pPr>
             <a:r>
-              <a:rPr lang="en-US" sz="2000" dirty="0"/>
+              <a:rPr lang="en-US" sz="2000" dirty="0">
+                <a:latin typeface="Times New Roman" panose="02020603050405020304" pitchFamily="18" charset="0"/>
+                <a:cs typeface="Times New Roman" panose="02020603050405020304" pitchFamily="18" charset="0"/>
+              </a:rPr>
               <a:t>Nuclear fusion</a:t>
             </a:r>
           </a:p>
@@ -3795,7 +3808,10 @@
               <a:buChar char="•"/>
             </a:pPr>
             <a:r>
-              <a:rPr lang="en-US" sz="2000" dirty="0"/>
+              <a:rPr lang="en-US" sz="2000" dirty="0">
+                <a:latin typeface="Times New Roman" panose="02020603050405020304" pitchFamily="18" charset="0"/>
+                <a:cs typeface="Times New Roman" panose="02020603050405020304" pitchFamily="18" charset="0"/>
+              </a:rPr>
               <a:t>Synthesis reactions of hydrogen and helium</a:t>
             </a:r>
           </a:p>
@@ -3808,7 +3824,10 @@
               <a:buChar char="•"/>
             </a:pPr>
             <a:r>
-              <a:rPr lang="en-US" sz="2000" dirty="0"/>
+              <a:rPr lang="en-US" sz="2000" dirty="0">
+                <a:latin typeface="Times New Roman" panose="02020603050405020304" pitchFamily="18" charset="0"/>
+                <a:cs typeface="Times New Roman" panose="02020603050405020304" pitchFamily="18" charset="0"/>
+              </a:rPr>
               <a:t>Hydrogen bombs</a:t>
             </a:r>
           </a:p>
@@ -3821,10 +3840,16 @@
               <a:buChar char="•"/>
             </a:pPr>
             <a:r>
-              <a:rPr lang="en-US" sz="2000" dirty="0"/>
+              <a:rPr lang="en-US" sz="2000" dirty="0">
+                <a:latin typeface="Times New Roman" panose="02020603050405020304" pitchFamily="18" charset="0"/>
+                <a:cs typeface="Times New Roman" panose="02020603050405020304" pitchFamily="18" charset="0"/>
+              </a:rPr>
               <a:t>National Ignition Facility</a:t>
             </a:r>
-            <a:endParaRPr lang="ru-RU" sz="2000" dirty="0"/>
+            <a:endParaRPr lang="ru-RU" sz="2000" dirty="0">
+              <a:latin typeface="Times New Roman" panose="02020603050405020304" pitchFamily="18" charset="0"/>
+              <a:cs typeface="Times New Roman" panose="02020603050405020304" pitchFamily="18" charset="0"/>
+            </a:endParaRPr>
           </a:p>
         </p:txBody>
       </p:sp>
@@ -4012,6 +4037,8 @@
                   <a:srgbClr val="1F1F1F"/>
                 </a:solidFill>
                 <a:effectLst/>
+                <a:latin typeface="Times New Roman" panose="02020603050405020304" pitchFamily="18" charset="0"/>
+                <a:cs typeface="Times New Roman" panose="02020603050405020304" pitchFamily="18" charset="0"/>
               </a:rPr>
               <a:t>Experimental setup</a:t>
             </a:r>
@@ -4020,6 +4047,8 @@
                 <a:srgbClr val="1F1F1F"/>
               </a:solidFill>
               <a:effectLst/>
+              <a:latin typeface="Times New Roman" panose="02020603050405020304" pitchFamily="18" charset="0"/>
+              <a:cs typeface="Times New Roman" panose="02020603050405020304" pitchFamily="18" charset="0"/>
             </a:endParaRPr>
           </a:p>
           <a:p>
@@ -4036,6 +4065,8 @@
                   <a:srgbClr val="1F1F1F"/>
                 </a:solidFill>
                 <a:effectLst/>
+                <a:latin typeface="Times New Roman" panose="02020603050405020304" pitchFamily="18" charset="0"/>
+                <a:cs typeface="Times New Roman" panose="02020603050405020304" pitchFamily="18" charset="0"/>
               </a:rPr>
               <a:t>Speed of the experiment</a:t>
             </a:r>
@@ -4044,6 +4075,8 @@
                 <a:srgbClr val="1F1F1F"/>
               </a:solidFill>
               <a:effectLst/>
+              <a:latin typeface="Times New Roman" panose="02020603050405020304" pitchFamily="18" charset="0"/>
+              <a:cs typeface="Times New Roman" panose="02020603050405020304" pitchFamily="18" charset="0"/>
             </a:endParaRPr>
           </a:p>
           <a:p>
@@ -4055,10 +4088,16 @@
               <a:buChar char="•"/>
             </a:pPr>
             <a:r>
-              <a:rPr lang="en-US" sz="2000" dirty="0"/>
+              <a:rPr lang="en-US" sz="2000" dirty="0">
+                <a:latin typeface="Times New Roman" panose="02020603050405020304" pitchFamily="18" charset="0"/>
+                <a:cs typeface="Times New Roman" panose="02020603050405020304" pitchFamily="18" charset="0"/>
+              </a:rPr>
               <a:t>Fuel “ignition”</a:t>
             </a:r>
-            <a:endParaRPr lang="ru-RU" sz="2000" dirty="0"/>
+            <a:endParaRPr lang="ru-RU" sz="2000" dirty="0">
+              <a:latin typeface="Times New Roman" panose="02020603050405020304" pitchFamily="18" charset="0"/>
+              <a:cs typeface="Times New Roman" panose="02020603050405020304" pitchFamily="18" charset="0"/>
+            </a:endParaRPr>
           </a:p>
         </p:txBody>
       </p:sp>
@@ -4122,12 +4161,14 @@
           <a:p>
             <a:r>
               <a:rPr lang="en-US" sz="4800" dirty="0">
-                <a:latin typeface="+mn-lt"/>
+                <a:latin typeface="Times New Roman" panose="02020603050405020304" pitchFamily="18" charset="0"/>
+                <a:cs typeface="Times New Roman" panose="02020603050405020304" pitchFamily="18" charset="0"/>
               </a:rPr>
               <a:t>Thank you for your attention!</a:t>
             </a:r>
             <a:endParaRPr lang="ru-RU" sz="4800" dirty="0">
-              <a:latin typeface="+mn-lt"/>
+              <a:latin typeface="Times New Roman" panose="02020603050405020304" pitchFamily="18" charset="0"/>
+              <a:cs typeface="Times New Roman" panose="02020603050405020304" pitchFamily="18" charset="0"/>
             </a:endParaRPr>
           </a:p>
         </p:txBody>
@@ -4305,7 +4346,7 @@
               <a:tabLst/>
             </a:pPr>
             <a:r>
-              <a:rPr kumimoji="0" lang="ru-RU" altLang="ru-RU" sz="2100" b="0" i="0" u="none" strike="noStrike" cap="none" normalizeH="0" baseline="0">
+              <a:rPr kumimoji="0" lang="ru-RU" altLang="ru-RU" sz="2100" b="0" i="0" u="none" strike="noStrike" cap="none" normalizeH="0" baseline="0" dirty="0" err="1">
                 <a:ln>
                   <a:noFill/>
                 </a:ln>
@@ -4313,23 +4354,432 @@
                   <a:srgbClr val="1F1F1F"/>
                 </a:solidFill>
                 <a:effectLst/>
-                <a:latin typeface="inherit"/>
+                <a:latin typeface="Times New Roman" panose="02020603050405020304" pitchFamily="18" charset="0"/>
+                <a:cs typeface="Times New Roman" panose="02020603050405020304" pitchFamily="18" charset="0"/>
               </a:rPr>
-              <a:t>Soviet and Russian physicist, Doctor of Physical and Mathematical Sciences, chief researcher at the Institute of Nuclear Physics. G. I. Budkera SB RAS</a:t>
-            </a:r>
-            <a:r>
-              <a:rPr kumimoji="0" lang="ru-RU" altLang="ru-RU" sz="800" b="0" i="0" u="none" strike="noStrike" cap="none" normalizeH="0" baseline="0">
+              <a:t>Soviet</a:t>
+            </a:r>
+            <a:r>
+              <a:rPr kumimoji="0" lang="ru-RU" altLang="ru-RU" sz="2100" b="0" i="0" u="none" strike="noStrike" cap="none" normalizeH="0" baseline="0" dirty="0">
                 <a:ln>
                   <a:noFill/>
                 </a:ln>
                 <a:solidFill>
-                  <a:schemeClr val="tx1"/>
+                  <a:srgbClr val="1F1F1F"/>
                 </a:solidFill>
                 <a:effectLst/>
+                <a:latin typeface="Times New Roman" panose="02020603050405020304" pitchFamily="18" charset="0"/>
+                <a:cs typeface="Times New Roman" panose="02020603050405020304" pitchFamily="18" charset="0"/>
               </a:rPr>
               <a:t> </a:t>
             </a:r>
-            <a:endParaRPr kumimoji="0" lang="ru-RU" altLang="ru-RU" sz="1800" b="0" i="0" u="none" strike="noStrike" cap="none" normalizeH="0" baseline="0">
+            <a:r>
+              <a:rPr kumimoji="0" lang="ru-RU" altLang="ru-RU" sz="2100" b="0" i="0" u="none" strike="noStrike" cap="none" normalizeH="0" baseline="0" dirty="0" err="1">
+                <a:ln>
+                  <a:noFill/>
+                </a:ln>
+                <a:solidFill>
+                  <a:srgbClr val="1F1F1F"/>
+                </a:solidFill>
+                <a:effectLst/>
+                <a:latin typeface="Times New Roman" panose="02020603050405020304" pitchFamily="18" charset="0"/>
+                <a:cs typeface="Times New Roman" panose="02020603050405020304" pitchFamily="18" charset="0"/>
+              </a:rPr>
+              <a:t>and</a:t>
+            </a:r>
+            <a:r>
+              <a:rPr kumimoji="0" lang="ru-RU" altLang="ru-RU" sz="2100" b="0" i="0" u="none" strike="noStrike" cap="none" normalizeH="0" baseline="0" dirty="0">
+                <a:ln>
+                  <a:noFill/>
+                </a:ln>
+                <a:solidFill>
+                  <a:srgbClr val="1F1F1F"/>
+                </a:solidFill>
+                <a:effectLst/>
+                <a:latin typeface="Times New Roman" panose="02020603050405020304" pitchFamily="18" charset="0"/>
+                <a:cs typeface="Times New Roman" panose="02020603050405020304" pitchFamily="18" charset="0"/>
+              </a:rPr>
+              <a:t> Russian </a:t>
+            </a:r>
+            <a:r>
+              <a:rPr kumimoji="0" lang="ru-RU" altLang="ru-RU" sz="2100" b="0" i="0" u="none" strike="noStrike" cap="none" normalizeH="0" baseline="0" dirty="0" err="1">
+                <a:ln>
+                  <a:noFill/>
+                </a:ln>
+                <a:solidFill>
+                  <a:srgbClr val="1F1F1F"/>
+                </a:solidFill>
+                <a:effectLst/>
+                <a:latin typeface="Times New Roman" panose="02020603050405020304" pitchFamily="18" charset="0"/>
+                <a:cs typeface="Times New Roman" panose="02020603050405020304" pitchFamily="18" charset="0"/>
+              </a:rPr>
+              <a:t>physicist</a:t>
+            </a:r>
+            <a:r>
+              <a:rPr kumimoji="0" lang="ru-RU" altLang="ru-RU" sz="2100" b="0" i="0" u="none" strike="noStrike" cap="none" normalizeH="0" baseline="0" dirty="0">
+                <a:ln>
+                  <a:noFill/>
+                </a:ln>
+                <a:solidFill>
+                  <a:srgbClr val="1F1F1F"/>
+                </a:solidFill>
+                <a:effectLst/>
+                <a:latin typeface="Times New Roman" panose="02020603050405020304" pitchFamily="18" charset="0"/>
+                <a:cs typeface="Times New Roman" panose="02020603050405020304" pitchFamily="18" charset="0"/>
+              </a:rPr>
+              <a:t>, Doctor </a:t>
+            </a:r>
+            <a:r>
+              <a:rPr kumimoji="0" lang="ru-RU" altLang="ru-RU" sz="2100" b="0" i="0" u="none" strike="noStrike" cap="none" normalizeH="0" baseline="0" dirty="0" err="1">
+                <a:ln>
+                  <a:noFill/>
+                </a:ln>
+                <a:solidFill>
+                  <a:srgbClr val="1F1F1F"/>
+                </a:solidFill>
+                <a:effectLst/>
+                <a:latin typeface="Times New Roman" panose="02020603050405020304" pitchFamily="18" charset="0"/>
+                <a:cs typeface="Times New Roman" panose="02020603050405020304" pitchFamily="18" charset="0"/>
+              </a:rPr>
+              <a:t>of</a:t>
+            </a:r>
+            <a:r>
+              <a:rPr kumimoji="0" lang="ru-RU" altLang="ru-RU" sz="2100" b="0" i="0" u="none" strike="noStrike" cap="none" normalizeH="0" baseline="0" dirty="0">
+                <a:ln>
+                  <a:noFill/>
+                </a:ln>
+                <a:solidFill>
+                  <a:srgbClr val="1F1F1F"/>
+                </a:solidFill>
+                <a:effectLst/>
+                <a:latin typeface="Times New Roman" panose="02020603050405020304" pitchFamily="18" charset="0"/>
+                <a:cs typeface="Times New Roman" panose="02020603050405020304" pitchFamily="18" charset="0"/>
+              </a:rPr>
+              <a:t> </a:t>
+            </a:r>
+            <a:r>
+              <a:rPr kumimoji="0" lang="ru-RU" altLang="ru-RU" sz="2100" b="0" i="0" u="none" strike="noStrike" cap="none" normalizeH="0" baseline="0" dirty="0" err="1">
+                <a:ln>
+                  <a:noFill/>
+                </a:ln>
+                <a:solidFill>
+                  <a:srgbClr val="1F1F1F"/>
+                </a:solidFill>
+                <a:effectLst/>
+                <a:latin typeface="Times New Roman" panose="02020603050405020304" pitchFamily="18" charset="0"/>
+                <a:cs typeface="Times New Roman" panose="02020603050405020304" pitchFamily="18" charset="0"/>
+              </a:rPr>
+              <a:t>Physical</a:t>
+            </a:r>
+            <a:r>
+              <a:rPr kumimoji="0" lang="ru-RU" altLang="ru-RU" sz="2100" b="0" i="0" u="none" strike="noStrike" cap="none" normalizeH="0" baseline="0" dirty="0">
+                <a:ln>
+                  <a:noFill/>
+                </a:ln>
+                <a:solidFill>
+                  <a:srgbClr val="1F1F1F"/>
+                </a:solidFill>
+                <a:effectLst/>
+                <a:latin typeface="Times New Roman" panose="02020603050405020304" pitchFamily="18" charset="0"/>
+                <a:cs typeface="Times New Roman" panose="02020603050405020304" pitchFamily="18" charset="0"/>
+              </a:rPr>
+              <a:t> </a:t>
+            </a:r>
+            <a:r>
+              <a:rPr kumimoji="0" lang="ru-RU" altLang="ru-RU" sz="2100" b="0" i="0" u="none" strike="noStrike" cap="none" normalizeH="0" baseline="0" dirty="0" err="1">
+                <a:ln>
+                  <a:noFill/>
+                </a:ln>
+                <a:solidFill>
+                  <a:srgbClr val="1F1F1F"/>
+                </a:solidFill>
+                <a:effectLst/>
+                <a:latin typeface="Times New Roman" panose="02020603050405020304" pitchFamily="18" charset="0"/>
+                <a:cs typeface="Times New Roman" panose="02020603050405020304" pitchFamily="18" charset="0"/>
+              </a:rPr>
+              <a:t>and</a:t>
+            </a:r>
+            <a:r>
+              <a:rPr kumimoji="0" lang="ru-RU" altLang="ru-RU" sz="2100" b="0" i="0" u="none" strike="noStrike" cap="none" normalizeH="0" baseline="0" dirty="0">
+                <a:ln>
+                  <a:noFill/>
+                </a:ln>
+                <a:solidFill>
+                  <a:srgbClr val="1F1F1F"/>
+                </a:solidFill>
+                <a:effectLst/>
+                <a:latin typeface="Times New Roman" panose="02020603050405020304" pitchFamily="18" charset="0"/>
+                <a:cs typeface="Times New Roman" panose="02020603050405020304" pitchFamily="18" charset="0"/>
+              </a:rPr>
+              <a:t> </a:t>
+            </a:r>
+            <a:r>
+              <a:rPr kumimoji="0" lang="ru-RU" altLang="ru-RU" sz="2100" b="0" i="0" u="none" strike="noStrike" cap="none" normalizeH="0" baseline="0" dirty="0" err="1">
+                <a:ln>
+                  <a:noFill/>
+                </a:ln>
+                <a:solidFill>
+                  <a:srgbClr val="1F1F1F"/>
+                </a:solidFill>
+                <a:effectLst/>
+                <a:latin typeface="Times New Roman" panose="02020603050405020304" pitchFamily="18" charset="0"/>
+                <a:cs typeface="Times New Roman" panose="02020603050405020304" pitchFamily="18" charset="0"/>
+              </a:rPr>
+              <a:t>Mathematical</a:t>
+            </a:r>
+            <a:r>
+              <a:rPr kumimoji="0" lang="ru-RU" altLang="ru-RU" sz="2100" b="0" i="0" u="none" strike="noStrike" cap="none" normalizeH="0" baseline="0" dirty="0">
+                <a:ln>
+                  <a:noFill/>
+                </a:ln>
+                <a:solidFill>
+                  <a:srgbClr val="1F1F1F"/>
+                </a:solidFill>
+                <a:effectLst/>
+                <a:latin typeface="Times New Roman" panose="02020603050405020304" pitchFamily="18" charset="0"/>
+                <a:cs typeface="Times New Roman" panose="02020603050405020304" pitchFamily="18" charset="0"/>
+              </a:rPr>
+              <a:t> Sciences, </a:t>
+            </a:r>
+            <a:r>
+              <a:rPr kumimoji="0" lang="ru-RU" altLang="ru-RU" sz="2100" b="0" i="0" u="none" strike="noStrike" cap="none" normalizeH="0" baseline="0" dirty="0" err="1">
+                <a:ln>
+                  <a:noFill/>
+                </a:ln>
+                <a:solidFill>
+                  <a:srgbClr val="1F1F1F"/>
+                </a:solidFill>
+                <a:effectLst/>
+                <a:latin typeface="Times New Roman" panose="02020603050405020304" pitchFamily="18" charset="0"/>
+                <a:cs typeface="Times New Roman" panose="02020603050405020304" pitchFamily="18" charset="0"/>
+              </a:rPr>
+              <a:t>chief</a:t>
+            </a:r>
+            <a:r>
+              <a:rPr kumimoji="0" lang="ru-RU" altLang="ru-RU" sz="2100" b="0" i="0" u="none" strike="noStrike" cap="none" normalizeH="0" baseline="0" dirty="0">
+                <a:ln>
+                  <a:noFill/>
+                </a:ln>
+                <a:solidFill>
+                  <a:srgbClr val="1F1F1F"/>
+                </a:solidFill>
+                <a:effectLst/>
+                <a:latin typeface="Times New Roman" panose="02020603050405020304" pitchFamily="18" charset="0"/>
+                <a:cs typeface="Times New Roman" panose="02020603050405020304" pitchFamily="18" charset="0"/>
+              </a:rPr>
+              <a:t> </a:t>
+            </a:r>
+            <a:r>
+              <a:rPr kumimoji="0" lang="ru-RU" altLang="ru-RU" sz="2100" b="0" i="0" u="none" strike="noStrike" cap="none" normalizeH="0" baseline="0" dirty="0" err="1">
+                <a:ln>
+                  <a:noFill/>
+                </a:ln>
+                <a:solidFill>
+                  <a:srgbClr val="1F1F1F"/>
+                </a:solidFill>
+                <a:effectLst/>
+                <a:latin typeface="Times New Roman" panose="02020603050405020304" pitchFamily="18" charset="0"/>
+                <a:cs typeface="Times New Roman" panose="02020603050405020304" pitchFamily="18" charset="0"/>
+              </a:rPr>
+              <a:t>researcher</a:t>
+            </a:r>
+            <a:r>
+              <a:rPr kumimoji="0" lang="ru-RU" altLang="ru-RU" sz="2100" b="0" i="0" u="none" strike="noStrike" cap="none" normalizeH="0" baseline="0" dirty="0">
+                <a:ln>
+                  <a:noFill/>
+                </a:ln>
+                <a:solidFill>
+                  <a:srgbClr val="1F1F1F"/>
+                </a:solidFill>
+                <a:effectLst/>
+                <a:latin typeface="Times New Roman" panose="02020603050405020304" pitchFamily="18" charset="0"/>
+                <a:cs typeface="Times New Roman" panose="02020603050405020304" pitchFamily="18" charset="0"/>
+              </a:rPr>
+              <a:t> </a:t>
+            </a:r>
+            <a:r>
+              <a:rPr kumimoji="0" lang="ru-RU" altLang="ru-RU" sz="2100" b="0" i="0" u="none" strike="noStrike" cap="none" normalizeH="0" baseline="0" dirty="0" err="1">
+                <a:ln>
+                  <a:noFill/>
+                </a:ln>
+                <a:solidFill>
+                  <a:srgbClr val="1F1F1F"/>
+                </a:solidFill>
+                <a:effectLst/>
+                <a:latin typeface="Times New Roman" panose="02020603050405020304" pitchFamily="18" charset="0"/>
+                <a:cs typeface="Times New Roman" panose="02020603050405020304" pitchFamily="18" charset="0"/>
+              </a:rPr>
+              <a:t>at</a:t>
+            </a:r>
+            <a:r>
+              <a:rPr kumimoji="0" lang="ru-RU" altLang="ru-RU" sz="2100" b="0" i="0" u="none" strike="noStrike" cap="none" normalizeH="0" baseline="0" dirty="0">
+                <a:ln>
+                  <a:noFill/>
+                </a:ln>
+                <a:solidFill>
+                  <a:srgbClr val="1F1F1F"/>
+                </a:solidFill>
+                <a:effectLst/>
+                <a:latin typeface="Times New Roman" panose="02020603050405020304" pitchFamily="18" charset="0"/>
+                <a:cs typeface="Times New Roman" panose="02020603050405020304" pitchFamily="18" charset="0"/>
+              </a:rPr>
+              <a:t> </a:t>
+            </a:r>
+            <a:r>
+              <a:rPr kumimoji="0" lang="ru-RU" altLang="ru-RU" sz="2100" b="0" i="0" u="none" strike="noStrike" cap="none" normalizeH="0" baseline="0" dirty="0" err="1">
+                <a:ln>
+                  <a:noFill/>
+                </a:ln>
+                <a:solidFill>
+                  <a:srgbClr val="1F1F1F"/>
+                </a:solidFill>
+                <a:effectLst/>
+                <a:latin typeface="Times New Roman" panose="02020603050405020304" pitchFamily="18" charset="0"/>
+                <a:cs typeface="Times New Roman" panose="02020603050405020304" pitchFamily="18" charset="0"/>
+              </a:rPr>
+              <a:t>the</a:t>
+            </a:r>
+            <a:r>
+              <a:rPr kumimoji="0" lang="ru-RU" altLang="ru-RU" sz="2100" b="0" i="0" u="none" strike="noStrike" cap="none" normalizeH="0" baseline="0" dirty="0">
+                <a:ln>
+                  <a:noFill/>
+                </a:ln>
+                <a:solidFill>
+                  <a:srgbClr val="1F1F1F"/>
+                </a:solidFill>
+                <a:effectLst/>
+                <a:latin typeface="Times New Roman" panose="02020603050405020304" pitchFamily="18" charset="0"/>
+                <a:cs typeface="Times New Roman" panose="02020603050405020304" pitchFamily="18" charset="0"/>
+              </a:rPr>
+              <a:t> Institute </a:t>
+            </a:r>
+            <a:r>
+              <a:rPr kumimoji="0" lang="ru-RU" altLang="ru-RU" sz="2100" b="0" i="0" u="none" strike="noStrike" cap="none" normalizeH="0" baseline="0" dirty="0" err="1">
+                <a:ln>
+                  <a:noFill/>
+                </a:ln>
+                <a:solidFill>
+                  <a:srgbClr val="1F1F1F"/>
+                </a:solidFill>
+                <a:effectLst/>
+                <a:latin typeface="Times New Roman" panose="02020603050405020304" pitchFamily="18" charset="0"/>
+                <a:cs typeface="Times New Roman" panose="02020603050405020304" pitchFamily="18" charset="0"/>
+              </a:rPr>
+              <a:t>of</a:t>
+            </a:r>
+            <a:r>
+              <a:rPr kumimoji="0" lang="ru-RU" altLang="ru-RU" sz="2100" b="0" i="0" u="none" strike="noStrike" cap="none" normalizeH="0" baseline="0" dirty="0">
+                <a:ln>
+                  <a:noFill/>
+                </a:ln>
+                <a:solidFill>
+                  <a:srgbClr val="1F1F1F"/>
+                </a:solidFill>
+                <a:effectLst/>
+                <a:latin typeface="Times New Roman" panose="02020603050405020304" pitchFamily="18" charset="0"/>
+                <a:cs typeface="Times New Roman" panose="02020603050405020304" pitchFamily="18" charset="0"/>
+              </a:rPr>
+              <a:t> </a:t>
+            </a:r>
+            <a:r>
+              <a:rPr kumimoji="0" lang="ru-RU" altLang="ru-RU" sz="2100" b="0" i="0" u="none" strike="noStrike" cap="none" normalizeH="0" baseline="0" dirty="0" err="1">
+                <a:ln>
+                  <a:noFill/>
+                </a:ln>
+                <a:solidFill>
+                  <a:srgbClr val="1F1F1F"/>
+                </a:solidFill>
+                <a:effectLst/>
+                <a:latin typeface="Times New Roman" panose="02020603050405020304" pitchFamily="18" charset="0"/>
+                <a:cs typeface="Times New Roman" panose="02020603050405020304" pitchFamily="18" charset="0"/>
+              </a:rPr>
+              <a:t>Nuclear</a:t>
+            </a:r>
+            <a:r>
+              <a:rPr kumimoji="0" lang="ru-RU" altLang="ru-RU" sz="2100" b="0" i="0" u="none" strike="noStrike" cap="none" normalizeH="0" baseline="0" dirty="0">
+                <a:ln>
+                  <a:noFill/>
+                </a:ln>
+                <a:solidFill>
+                  <a:srgbClr val="1F1F1F"/>
+                </a:solidFill>
+                <a:effectLst/>
+                <a:latin typeface="Times New Roman" panose="02020603050405020304" pitchFamily="18" charset="0"/>
+                <a:cs typeface="Times New Roman" panose="02020603050405020304" pitchFamily="18" charset="0"/>
+              </a:rPr>
+              <a:t> </a:t>
+            </a:r>
+            <a:r>
+              <a:rPr kumimoji="0" lang="ru-RU" altLang="ru-RU" sz="2100" b="0" i="0" u="none" strike="noStrike" cap="none" normalizeH="0" baseline="0" dirty="0" err="1">
+                <a:ln>
+                  <a:noFill/>
+                </a:ln>
+                <a:solidFill>
+                  <a:srgbClr val="1F1F1F"/>
+                </a:solidFill>
+                <a:effectLst/>
+                <a:latin typeface="Times New Roman" panose="02020603050405020304" pitchFamily="18" charset="0"/>
+                <a:cs typeface="Times New Roman" panose="02020603050405020304" pitchFamily="18" charset="0"/>
+              </a:rPr>
+              <a:t>Physics</a:t>
+            </a:r>
+            <a:r>
+              <a:rPr kumimoji="0" lang="ru-RU" altLang="ru-RU" sz="2100" b="0" i="0" u="none" strike="noStrike" cap="none" normalizeH="0" baseline="0" dirty="0">
+                <a:ln>
+                  <a:noFill/>
+                </a:ln>
+                <a:solidFill>
+                  <a:srgbClr val="1F1F1F"/>
+                </a:solidFill>
+                <a:effectLst/>
+                <a:latin typeface="Times New Roman" panose="02020603050405020304" pitchFamily="18" charset="0"/>
+                <a:cs typeface="Times New Roman" panose="02020603050405020304" pitchFamily="18" charset="0"/>
+              </a:rPr>
+              <a:t>. G. I. </a:t>
+            </a:r>
+            <a:r>
+              <a:rPr kumimoji="0" lang="ru-RU" altLang="ru-RU" sz="2100" b="0" i="0" u="none" strike="noStrike" cap="none" normalizeH="0" baseline="0" dirty="0" err="1">
+                <a:ln>
+                  <a:noFill/>
+                </a:ln>
+                <a:solidFill>
+                  <a:srgbClr val="1F1F1F"/>
+                </a:solidFill>
+                <a:effectLst/>
+                <a:latin typeface="Times New Roman" panose="02020603050405020304" pitchFamily="18" charset="0"/>
+                <a:cs typeface="Times New Roman" panose="02020603050405020304" pitchFamily="18" charset="0"/>
+              </a:rPr>
+              <a:t>Budkera</a:t>
+            </a:r>
+            <a:r>
+              <a:rPr kumimoji="0" lang="ru-RU" altLang="ru-RU" sz="2100" b="0" i="0" u="none" strike="noStrike" cap="none" normalizeH="0" baseline="0" dirty="0">
+                <a:ln>
+                  <a:noFill/>
+                </a:ln>
+                <a:solidFill>
+                  <a:srgbClr val="1F1F1F"/>
+                </a:solidFill>
+                <a:effectLst/>
+                <a:latin typeface="Times New Roman" panose="02020603050405020304" pitchFamily="18" charset="0"/>
+                <a:cs typeface="Times New Roman" panose="02020603050405020304" pitchFamily="18" charset="0"/>
+              </a:rPr>
+              <a:t> SB RAS</a:t>
+            </a:r>
+            <a:r>
+              <a:rPr kumimoji="0" lang="ru-RU" altLang="ru-RU" sz="800" b="0" i="0" u="none" strike="noStrike" cap="none" normalizeH="0" baseline="0" dirty="0">
+                <a:ln>
+                  <a:noFill/>
+                </a:ln>
+                <a:solidFill>
+                  <a:schemeClr val="tx1"/>
+                </a:solidFill>
+                <a:effectLst/>
+                <a:latin typeface="Times New Roman" panose="02020603050405020304" pitchFamily="18" charset="0"/>
+                <a:cs typeface="Times New Roman" panose="02020603050405020304" pitchFamily="18" charset="0"/>
+              </a:rPr>
+              <a:t> </a:t>
+            </a:r>
+            <a:endParaRPr kumimoji="0" lang="ru-RU" altLang="ru-RU" sz="1800" b="0" i="0" u="none" strike="noStrike" cap="none" normalizeH="0" baseline="0" dirty="0">
               <a:ln>
                 <a:noFill/>
               </a:ln>
@@ -4337,7 +4787,8 @@
                 <a:schemeClr val="tx1"/>
               </a:solidFill>
               <a:effectLst/>
-              <a:latin typeface="Arial" panose="020B0604020202020204" pitchFamily="34" charset="0"/>
+              <a:latin typeface="Times New Roman" panose="02020603050405020304" pitchFamily="18" charset="0"/>
+              <a:cs typeface="Times New Roman" panose="02020603050405020304" pitchFamily="18" charset="0"/>
             </a:endParaRPr>
           </a:p>
         </p:txBody>
